--- a/presentations/methode/fr/methode.fr.pptx
+++ b/presentations/methode/fr/methode.fr.pptx
@@ -6174,7 +6174,7 @@
                 <a:ea typeface="Fraunces" pitchFamily="34" charset="-122"/>
                 <a:cs typeface="Fraunces" pitchFamily="34" charset="-120"/>
               </a:rPr>
-              <a:t>L’échelle suit l’offre, et la règle dure ne bouge pas</a:t>
+              <a:t>Ce que l’échelle vous donne, niveau par niveau</a:t>
             </a:r>
             <a:endParaRPr lang="en-US" sz="3400" dirty="0"/>
           </a:p>
@@ -6217,7 +6217,7 @@
                 <a:ea typeface="Inter" pitchFamily="34" charset="-122"/>
                 <a:cs typeface="Inter" pitchFamily="34" charset="-120"/>
               </a:rPr>
-              <a:t>Public et Basic : diagnostic qualitatif, bas → critique.</a:t>
+              <a:t>Public et Basic — un diagnostic qualitatif, bas → critique : de quoi situer un corridor et le comparer à un autre.</a:t>
             </a:r>
             <a:endParaRPr lang="en-US" sz="1500" dirty="0"/>
           </a:p>
@@ -6238,7 +6238,7 @@
                 <a:ea typeface="Inter" pitchFamily="34" charset="-122"/>
                 <a:cs typeface="Inter" pitchFamily="34" charset="-120"/>
               </a:rPr>
-              <a:t>Standard : score 0–5 par dimension, plus un niveau global qualitatif.</a:t>
+              <a:t>Standard — un score 0–5 par dimension : de quoi voir OÙ se loge la vulnérabilité, et donc sur quoi agir.</a:t>
             </a:r>
             <a:endParaRPr lang="en-US" sz="1500" dirty="0"/>
           </a:p>
@@ -6259,7 +6259,7 @@
                 <a:ea typeface="Inter" pitchFamily="34" charset="-122"/>
                 <a:cs typeface="Inter" pitchFamily="34" charset="-120"/>
               </a:rPr>
-              <a:t>Premium : score agrégé 0–100, uniquement si la méthodologie est documentée.</a:t>
+              <a:t>Premium — un score agrégé 0–100, pondéré pour le contexte du client, dès lors que la méthodologie est documentée.</a:t>
             </a:r>
             <a:endParaRPr lang="en-US" sz="1500" dirty="0"/>
           </a:p>
@@ -6280,7 +6280,7 @@
                 <a:ea typeface="Inter" pitchFamily="34" charset="-122"/>
                 <a:cs typeface="Inter" pitchFamily="34" charset="-120"/>
               </a:rPr>
-              <a:t>Chaque score affiche ses sources, sa date, son niveau de confiance et ses incertitudes.</a:t>
+              <a:t>À tous les niveaux, chaque score affiche ses sources, sa date, son niveau de confiance et ses incertitudes.</a:t>
             </a:r>
             <a:endParaRPr lang="en-US" sz="1500" dirty="0"/>
           </a:p>

--- a/presentations/methode/fr/methode.fr.pptx
+++ b/presentations/methode/fr/methode.fr.pptx
@@ -217,10 +217,10 @@
                     <c:v>Infrastructure énergétique</c:v>
                   </c:pt>
                   <c:pt idx="6">
-                    <c:v>Autres infrastructures</c:v>
+                    <c:v>Portes aéro-cargo</c:v>
                   </c:pt>
                   <c:pt idx="7">
-                    <c:v>Portes aéro-cargo</c:v>
+                    <c:v>Autres infrastructures</c:v>
                   </c:pt>
                   <c:pt idx="8">
                     <c:v>Systèmes stratégiques</c:v>
@@ -236,13 +236,13 @@
                 <c:formatCode>General</c:formatCode>
                 <c:ptCount val="9"/>
                 <c:pt idx="0">
-                  <c:v>75</c:v>
+                  <c:v>77</c:v>
                 </c:pt>
                 <c:pt idx="1">
-                  <c:v>51</c:v>
+                  <c:v>53</c:v>
                 </c:pt>
                 <c:pt idx="2">
-                  <c:v>45</c:v>
+                  <c:v>49</c:v>
                 </c:pt>
                 <c:pt idx="3">
                   <c:v>36</c:v>
@@ -251,16 +251,16 @@
                   <c:v>32</c:v>
                 </c:pt>
                 <c:pt idx="5">
-                  <c:v>26</c:v>
+                  <c:v>28</c:v>
                 </c:pt>
                 <c:pt idx="6">
+                  <c:v>28</c:v>
+                </c:pt>
+                <c:pt idx="7">
                   <c:v>23</c:v>
                 </c:pt>
-                <c:pt idx="7">
-                  <c:v>18</c:v>
-                </c:pt>
                 <c:pt idx="8">
-                  <c:v>7</c:v>
+                  <c:v>8</c:v>
                 </c:pt>
               </c:numCache>
             </c:numRef>
@@ -4244,7 +4244,7 @@
                 <a:ea typeface="IBM Plex Mono" pitchFamily="34" charset="-122"/>
                 <a:cs typeface="IBM Plex Mono" pitchFamily="34" charset="-120"/>
               </a:rPr>
-              <a:t>MÉTHODE · FR · 2026-08-10</a:t>
+              <a:t>MÉTHODE · FR · 2026-08-21</a:t>
             </a:r>
             <a:endParaRPr lang="en-US" sz="1000" dirty="0"/>
           </a:p>
@@ -5698,7 +5698,7 @@
                 <a:ea typeface="Inter" pitchFamily="34" charset="-122"/>
                 <a:cs typeface="Inter" pitchFamily="34" charset="-120"/>
               </a:rPr>
-              <a:t>Au 2026-08-10 : 6 corridors instruits sur 313 portent les huit dimensions, 268 n’en portent que trois, et tous sont en bande critique. La grille discrimine en droit ; la base ne discrimine pas encore en fait.</a:t>
+              <a:t>Au 2026-08-21 : les 334 corridors instruits occupent les quatre bandes (127 / 137 / 65 / 5) — la base discriminait sur UNE bande six semaines plus tôt. Elle distingue mieux parce qu’elle affirme moins : la dimension concentration a été retirée des objets sans étude de substitution, et 275 corridors sur 334 ne portent plus que deux dimensions.</a:t>
             </a:r>
             <a:endParaRPr lang="en-US" sz="1500" dirty="0"/>
           </a:p>
@@ -20382,7 +20382,7 @@
                 <a:ea typeface="Fraunces" pitchFamily="34" charset="-122"/>
                 <a:cs typeface="Fraunces" pitchFamily="34" charset="-120"/>
               </a:rPr>
-              <a:t>313</a:t>
+              <a:t>334</a:t>
             </a:r>
             <a:endParaRPr lang="en-US" sz="5400" dirty="0"/>
           </a:p>
@@ -20525,7 +20525,7 @@
                 <a:ea typeface="Fraunces" pitchFamily="34" charset="-122"/>
                 <a:cs typeface="Fraunces" pitchFamily="34" charset="-120"/>
               </a:rPr>
-              <a:t>190</a:t>
+              <a:t>330</a:t>
             </a:r>
             <a:endParaRPr lang="en-US" sz="5400" dirty="0"/>
           </a:p>
@@ -20788,7 +20788,7 @@
                 <a:ea typeface="Inter" pitchFamily="34" charset="-122"/>
                 <a:cs typeface="Inter" pitchFamily="34" charset="-120"/>
               </a:rPr>
-              <a:t>Recensé n’est pas validé : la promotion d’un objet en priorité P0 exige des preuves sourcées et une validation humaine. 30 objets y sont aujourd’hui. Ce chiffre est celui du corpus instruit — la base sert par ailleurs 2 218 objets, dont l’essentiel n’a reçu aucun traitement analytique.</a:t>
+              <a:t>Recensé n’est pas validé : la promotion d’un objet en priorité P0 exige des preuves sourcées et une validation humaine. 30 objets y sont aujourd’hui. Ce chiffre est celui du corpus instruit — la base sert par ailleurs 2 239 objets, dont l’essentiel n’a reçu aucun traitement analytique.</a:t>
             </a:r>
             <a:endParaRPr lang="en-US" sz="1000" dirty="0"/>
           </a:p>
@@ -21380,7 +21380,7 @@
                 <a:ea typeface="IBM Plex Mono" pitchFamily="34" charset="-122"/>
                 <a:cs typeface="IBM Plex Mono" pitchFamily="34" charset="-120"/>
               </a:rPr>
-              <a:t>190</a:t>
+              <a:t>330</a:t>
             </a:r>
             <a:endParaRPr lang="en-US" sz="1200" dirty="0"/>
           </a:p>
@@ -21536,7 +21536,7 @@
                 <a:ea typeface="IBM Plex Mono" pitchFamily="34" charset="-122"/>
                 <a:cs typeface="IBM Plex Mono" pitchFamily="34" charset="-120"/>
               </a:rPr>
-              <a:t>90</a:t>
+              <a:t>126</a:t>
             </a:r>
             <a:endParaRPr lang="en-US" sz="1200" dirty="0"/>
           </a:p>
@@ -21614,7 +21614,7 @@
                 <a:ea typeface="IBM Plex Mono" pitchFamily="34" charset="-122"/>
                 <a:cs typeface="IBM Plex Mono" pitchFamily="34" charset="-120"/>
               </a:rPr>
-              <a:t>70</a:t>
+              <a:t>92</a:t>
             </a:r>
             <a:endParaRPr lang="en-US" sz="1200" dirty="0"/>
           </a:p>
@@ -21692,7 +21692,7 @@
                 <a:ea typeface="IBM Plex Mono" pitchFamily="34" charset="-122"/>
                 <a:cs typeface="IBM Plex Mono" pitchFamily="34" charset="-120"/>
               </a:rPr>
-              <a:t>0.18.0</a:t>
+              <a:t>4.0.0</a:t>
             </a:r>
             <a:endParaRPr lang="en-US" sz="1200" dirty="0"/>
           </a:p>
